--- a/assets/pptx/catalog-81.pptx
+++ b/assets/pptx/catalog-81.pptx
@@ -3249,7 +3249,7 @@
                 <a:ea typeface="Ebrima"/>
                 <a:cs typeface="Ebrima"/>
               </a:rPr>
-              <a:t>አከብርሃለሁ ክበር (3x)</a:t>
+              <a:t>አከብርሃለሁ ክበር 3x</a:t>
             </a:r>
           </a:p>
           <a:p>
@@ -3267,7 +3267,7 @@
                 <a:ea typeface="Ebrima"/>
                 <a:cs typeface="Ebrima"/>
               </a:rPr>
-              <a:t>ክብር ለአንተ ይሁን (2x)</a:t>
+              <a:t>ክብር ለአንተ ይሁን 2x</a:t>
             </a:r>
           </a:p>
         </p:txBody>
@@ -3334,7 +3334,7 @@
                 <a:ea typeface="Ebrima"/>
                 <a:cs typeface="Ebrima"/>
               </a:rPr>
-              <a:t>- አንተ ብሩክ ምንጭ ነህ (4x)</a:t>
+              <a:t>- አንተ ብሩክ ምንጭ ነህ 4x</a:t>
             </a:r>
           </a:p>
           <a:p>
@@ -3388,7 +3388,7 @@
                 <a:ea typeface="Ebrima"/>
                 <a:cs typeface="Ebrima"/>
               </a:rPr>
-              <a:t>አንተ የሰላም አባት (2x)</a:t>
+              <a:t>አንተ የሰላም አባት 2x</a:t>
             </a:r>
           </a:p>
         </p:txBody>
@@ -3576,7 +3576,7 @@
                 <a:ea typeface="Ebrima"/>
                 <a:cs typeface="Ebrima"/>
               </a:rPr>
-              <a:t>አከብርሃለሁ ክበር (3x)</a:t>
+              <a:t>አከብርሃለሁ ክበር 3x</a:t>
             </a:r>
           </a:p>
           <a:p>
@@ -3594,7 +3594,7 @@
                 <a:ea typeface="Ebrima"/>
                 <a:cs typeface="Ebrima"/>
               </a:rPr>
-              <a:t>ክብር ለአንተ ይሁን (2x)</a:t>
+              <a:t>ክብር ለአንተ ይሁን 2x</a:t>
             </a:r>
           </a:p>
         </p:txBody>
@@ -3661,7 +3661,7 @@
                 <a:ea typeface="Ebrima"/>
                 <a:cs typeface="Ebrima"/>
               </a:rPr>
-              <a:t>- አንተ ብሩክ ምንጭ ነህ (4x)</a:t>
+              <a:t>- አንተ ብሩክ ምንጭ ነህ 4x</a:t>
             </a:r>
           </a:p>
           <a:p>
@@ -3715,7 +3715,7 @@
                 <a:ea typeface="Ebrima"/>
                 <a:cs typeface="Ebrima"/>
               </a:rPr>
-              <a:t>አንተ የሰላም አባት (2x)</a:t>
+              <a:t>አንተ የሰላም አባት 2x</a:t>
             </a:r>
           </a:p>
         </p:txBody>
@@ -3903,7 +3903,7 @@
                 <a:ea typeface="Ebrima"/>
                 <a:cs typeface="Ebrima"/>
               </a:rPr>
-              <a:t>አከብርሃለሁ ክበር (3x)</a:t>
+              <a:t>አከብርሃለሁ ክበር 3x</a:t>
             </a:r>
           </a:p>
           <a:p>
@@ -3921,7 +3921,7 @@
                 <a:ea typeface="Ebrima"/>
                 <a:cs typeface="Ebrima"/>
               </a:rPr>
-              <a:t>ክብር ለአንተ ይሁን (2x)</a:t>
+              <a:t>ክብር ለአንተ ይሁን 2x</a:t>
             </a:r>
           </a:p>
         </p:txBody>
@@ -3988,7 +3988,7 @@
                 <a:ea typeface="Ebrima"/>
                 <a:cs typeface="Ebrima"/>
               </a:rPr>
-              <a:t>- አንተ ብሩክ ምንጭ ነህ (4x)</a:t>
+              <a:t>- አንተ ብሩክ ምንጭ ነህ 4x</a:t>
             </a:r>
           </a:p>
           <a:p>
@@ -4042,7 +4042,7 @@
                 <a:ea typeface="Ebrima"/>
                 <a:cs typeface="Ebrima"/>
               </a:rPr>
-              <a:t>አንተ የሰላም አባት (2x)</a:t>
+              <a:t>አንተ የሰላም አባት 2x</a:t>
             </a:r>
           </a:p>
         </p:txBody>
